--- a/classes/parte-11-devsecops-y-seguridad-del-sdlc/240-sca-dependencias-y-riesgo-de-terceros/clase-240-presentacion.pptx
+++ b/classes/parte-11-devsecops-y-seguridad-del-sdlc/240-sca-dependencias-y-riesgo-de-terceros/clase-240-presentacion.pptx
@@ -17,6 +17,10 @@
     <p:sldId id="265" r:id="rId16"/>
     <p:sldId id="266" r:id="rId17"/>
     <p:sldId id="267" r:id="rId18"/>
+    <p:sldId id="268" r:id="rId19"/>
+    <p:sldId id="269" r:id="rId20"/>
+    <p:sldId id="270" r:id="rId21"/>
+    <p:sldId id="271" r:id="rId22"/>
   </p:sldIdLst>
   <p:sldSz cx="9144000" cy="6858000" type="screen4x3"/>
   <p:notesSz cx="6858000" cy="9144000"/>
@@ -3198,7 +3202,7 @@
                   <a:srgbClr val="0B3D2E"/>
                 </a:solidFill>
               </a:rPr>
-              <a:t>⚠️ Errores comunes</a:t>
+              <a:t>🧪 Laboratorio guiado</a:t>
             </a:r>
           </a:p>
         </p:txBody>
@@ -3236,67 +3240,97 @@
                   <a:srgbClr val="22282E"/>
                 </a:solidFill>
               </a:rPr>
-              <a:t>•  Cientos de CVE y el equipo se paraliza — Priorizas por CVSS crudo. Filtra por EPSS/KEV y explotabilidad, empieza por lo alcanzable.</a:t>
-            </a:r>
-          </a:p>
-          <a:p>
-            <a:pPr>
-              <a:spcAft>
-                <a:spcPts val="600"/>
-              </a:spcAft>
-            </a:pPr>
-            <a:r>
-              <a:rPr sz="1500">
-                <a:solidFill>
-                  <a:srgbClr val="22282E"/>
-                </a:solidFill>
-              </a:rPr>
-              <a:t>•  Un CVE reportado no aplica a tu uso — La función vulnerable no se usa. Documenta como no explotable (VEX) y suprime.</a:t>
-            </a:r>
-          </a:p>
-          <a:p>
-            <a:pPr>
-              <a:spcAft>
-                <a:spcPts val="600"/>
-              </a:spcAft>
-            </a:pPr>
-            <a:r>
-              <a:rPr sz="1500">
-                <a:solidFill>
-                  <a:srgbClr val="22282E"/>
-                </a:solidFill>
-              </a:rPr>
-              <a:t>•  El escaneo no ve transitivas — Escaneas manifests, no el lockfile resuelto. Escanea el lockfile (package-lock.json, poetry.lock).</a:t>
-            </a:r>
-          </a:p>
-          <a:p>
-            <a:pPr>
-              <a:spcAft>
-                <a:spcPts val="600"/>
-              </a:spcAft>
-            </a:pPr>
-            <a:r>
-              <a:rPr sz="1500">
-                <a:solidFill>
-                  <a:srgbClr val="22282E"/>
-                </a:solidFill>
-              </a:rPr>
-              <a:t>•  Dependabot abre 50 PRs y nadie los revisa — Sin límite ni agrupación. Usa open-pull-requests-limit y grouping.</a:t>
-            </a:r>
-          </a:p>
-          <a:p>
-            <a:pPr>
-              <a:spcAft>
-                <a:spcPts val="600"/>
-              </a:spcAft>
-            </a:pPr>
-            <a:r>
-              <a:rPr sz="1500">
-                <a:solidFill>
-                  <a:srgbClr val="22282E"/>
-                </a:solidFill>
-              </a:rPr>
-              <a:t>•  Actualización rompe la app — Cambio breaking. Ten tests en CI que corran antes de mergear el PR de update.</a:t>
+              <a:t>•  Inspecciona el árbol de dependencias de un proyecto real (p. ej. npm ls --all o pip list + pipdeptree). Observa cuántas son transitivas.</a:t>
+            </a:r>
+          </a:p>
+          <a:p>
+            <a:pPr>
+              <a:spcAft>
+                <a:spcPts val="600"/>
+              </a:spcAft>
+            </a:pPr>
+            <a:r>
+              <a:rPr sz="1500">
+                <a:solidFill>
+                  <a:srgbClr val="22282E"/>
+                </a:solidFill>
+              </a:rPr>
+              <a:t>•  Escanea con Trivy:</a:t>
+            </a:r>
+          </a:p>
+          <a:p>
+            <a:pPr>
+              <a:spcAft>
+                <a:spcPts val="600"/>
+              </a:spcAft>
+            </a:pPr>
+            <a:r>
+              <a:rPr sz="1500">
+                <a:solidFill>
+                  <a:srgbClr val="22282E"/>
+                </a:solidFill>
+              </a:rPr>
+              <a:t>•  Escanea con Dependency-Check y compara resultados; nota que cada herramienta usa fuentes distintas y puede diferir.</a:t>
+            </a:r>
+          </a:p>
+          <a:p>
+            <a:pPr>
+              <a:spcAft>
+                <a:spcPts val="600"/>
+              </a:spcAft>
+            </a:pPr>
+            <a:r>
+              <a:rPr sz="1500">
+                <a:solidFill>
+                  <a:srgbClr val="22282E"/>
+                </a:solidFill>
+              </a:rPr>
+              <a:t>•  Prioriza con EPSS y KEV. Toma los 5 CVE reportados, busca su EPSS (api.first.org/data/v1/epss) y comprueba si están en el catálogo CISA KEV. Reordena por riesgo real, no por CVSS.</a:t>
+            </a:r>
+          </a:p>
+          <a:p>
+            <a:pPr>
+              <a:spcAft>
+                <a:spcPts val="600"/>
+              </a:spcAft>
+            </a:pPr>
+            <a:r>
+              <a:rPr sz="1500">
+                <a:solidFill>
+                  <a:srgbClr val="22282E"/>
+                </a:solidFill>
+              </a:rPr>
+              <a:t>•  Configura un gate en CI:</a:t>
+            </a:r>
+          </a:p>
+          <a:p>
+            <a:pPr>
+              <a:spcAft>
+                <a:spcPts val="600"/>
+              </a:spcAft>
+            </a:pPr>
+            <a:r>
+              <a:rPr sz="1500">
+                <a:solidFill>
+                  <a:srgbClr val="22282E"/>
+                </a:solidFill>
+              </a:rPr>
+              <a:t>•  Automatiza actualizaciones. Añade un dependabot.yml que abra PRs semanales para el ecosistema del proyecto:</a:t>
+            </a:r>
+          </a:p>
+          <a:p>
+            <a:pPr>
+              <a:spcAft>
+                <a:spcPts val="600"/>
+              </a:spcAft>
+            </a:pPr>
+            <a:r>
+              <a:rPr sz="1500">
+                <a:solidFill>
+                  <a:srgbClr val="22282E"/>
+                </a:solidFill>
+              </a:rPr>
+              <a:t>•  Detecta riesgo de licencia. Ejecuta trivy fs --scanners license ./ y localiza dependencias con licencias copyleft incompatibles con tu producto.</a:t>
             </a:r>
           </a:p>
         </p:txBody>
@@ -3347,7 +3381,7 @@
                   <a:srgbClr val="0B3D2E"/>
                 </a:solidFill>
               </a:rPr>
-              <a:t>❓ Preguntas frecuentes</a:t>
+              <a:t>✍️ Ejercicios</a:t>
             </a:r>
           </a:p>
         </p:txBody>
@@ -3385,97 +3419,82 @@
                   <a:srgbClr val="22282E"/>
                 </a:solidFill>
               </a:rPr>
-              <a:t>•  ❓ ¿SCA y SBOM son lo mismo?</a:t>
-            </a:r>
-          </a:p>
-          <a:p>
-            <a:pPr>
-              <a:spcAft>
-                <a:spcPts val="600"/>
-              </a:spcAft>
-            </a:pPr>
-            <a:r>
-              <a:rPr sz="1500">
-                <a:solidFill>
-                  <a:srgbClr val="22282E"/>
-                </a:solidFill>
-              </a:rPr>
-              <a:t>•  No. SCA es el proceso de analizar componentes por vulnerabilidades; el SBOM (clase 246) es el inventario resultante de componentes. SCA suele producir o consumir un SBOM.</a:t>
-            </a:r>
-          </a:p>
-          <a:p>
-            <a:pPr>
-              <a:spcAft>
-                <a:spcPts val="600"/>
-              </a:spcAft>
-            </a:pPr>
-            <a:r>
-              <a:rPr sz="1500">
-                <a:solidFill>
-                  <a:srgbClr val="22282E"/>
-                </a:solidFill>
-              </a:rPr>
-              <a:t>•  ❓ ¿Debo actualizar toda dependencia con CVE inmediatamente?</a:t>
-            </a:r>
-          </a:p>
-          <a:p>
-            <a:pPr>
-              <a:spcAft>
-                <a:spcPts val="600"/>
-              </a:spcAft>
-            </a:pPr>
-            <a:r>
-              <a:rPr sz="1500">
-                <a:solidFill>
-                  <a:srgbClr val="22282E"/>
-                </a:solidFill>
-              </a:rPr>
-              <a:t>•  No ciegamente. Prioriza por explotabilidad (KEV/EPSS), exposición y si tu código usa la parte vulnerable. Un CVE crítico en una función que no llamas puede esperar.</a:t>
-            </a:r>
-          </a:p>
-          <a:p>
-            <a:pPr>
-              <a:spcAft>
-                <a:spcPts val="600"/>
-              </a:spcAft>
-            </a:pPr>
-            <a:r>
-              <a:rPr sz="1500">
-                <a:solidFill>
-                  <a:srgbClr val="22282E"/>
-                </a:solidFill>
-              </a:rPr>
-              <a:t>•  ❓ ¿Por qué dos escáneres dan resultados distintos?</a:t>
-            </a:r>
-          </a:p>
-          <a:p>
-            <a:pPr>
-              <a:spcAft>
-                <a:spcPts val="600"/>
-              </a:spcAft>
-            </a:pPr>
-            <a:r>
-              <a:rPr sz="1500">
-                <a:solidFill>
-                  <a:srgbClr val="22282E"/>
-                </a:solidFill>
-              </a:rPr>
-              <a:t>•  Usan bases de datos y heurísticas de matching diferentes (NVD, GHSA, OSV) y distinta cobertura por ecosistema. Combinar dos mejora la cobertura.</a:t>
-            </a:r>
-          </a:p>
-          <a:p>
-            <a:pPr>
-              <a:spcAft>
-                <a:spcPts val="600"/>
-              </a:spcAft>
-            </a:pPr>
-            <a:r>
-              <a:rPr sz="1500">
-                <a:solidFill>
-                  <a:srgbClr val="22282E"/>
-                </a:solidFill>
-              </a:rPr>
-              <a:t>•  ❓ ¿Cómo me protejo de typosquatting?</a:t>
+              <a:t>•  Genera el árbol de dependencias de un proyecto y cuenta directas vs transitivas.</a:t>
+            </a:r>
+          </a:p>
+          <a:p>
+            <a:pPr>
+              <a:spcAft>
+                <a:spcPts val="600"/>
+              </a:spcAft>
+            </a:pPr>
+            <a:r>
+              <a:rPr sz="1500">
+                <a:solidFill>
+                  <a:srgbClr val="22282E"/>
+                </a:solidFill>
+              </a:rPr>
+              <a:t>•  Escanea el mismo repo con Trivy y Dependency-Check y explica las diferencias.</a:t>
+            </a:r>
+          </a:p>
+          <a:p>
+            <a:pPr>
+              <a:spcAft>
+                <a:spcPts val="600"/>
+              </a:spcAft>
+            </a:pPr>
+            <a:r>
+              <a:rPr sz="1500">
+                <a:solidFill>
+                  <a:srgbClr val="22282E"/>
+                </a:solidFill>
+              </a:rPr>
+              <a:t>•  Prioriza 5 CVE combinando CVSS, EPSS y KEV.</a:t>
+            </a:r>
+          </a:p>
+          <a:p>
+            <a:pPr>
+              <a:spcAft>
+                <a:spcPts val="600"/>
+              </a:spcAft>
+            </a:pPr>
+            <a:r>
+              <a:rPr sz="1500">
+                <a:solidFill>
+                  <a:srgbClr val="22282E"/>
+                </a:solidFill>
+              </a:rPr>
+              <a:t>•  Configura un gate que solo falle con CRITICAL explotable.</a:t>
+            </a:r>
+          </a:p>
+          <a:p>
+            <a:pPr>
+              <a:spcAft>
+                <a:spcPts val="600"/>
+              </a:spcAft>
+            </a:pPr>
+            <a:r>
+              <a:rPr sz="1500">
+                <a:solidFill>
+                  <a:srgbClr val="22282E"/>
+                </a:solidFill>
+              </a:rPr>
+              <a:t>•  Crea la configuración de Dependabot o Renovate para tu ecosistema.</a:t>
+            </a:r>
+          </a:p>
+          <a:p>
+            <a:pPr>
+              <a:spcAft>
+                <a:spcPts val="600"/>
+              </a:spcAft>
+            </a:pPr>
+            <a:r>
+              <a:rPr sz="1500">
+                <a:solidFill>
+                  <a:srgbClr val="22282E"/>
+                </a:solidFill>
+              </a:rPr>
+              <a:t>•  Detecta una dependencia con licencia problemática y propón alternativa.</a:t>
             </a:r>
           </a:p>
         </p:txBody>
@@ -3526,7 +3545,7 @@
                   <a:srgbClr val="0B3D2E"/>
                 </a:solidFill>
               </a:rPr>
-              <a:t>🔗 Referencias</a:t>
+              <a:t>📝 Reto verificable</a:t>
             </a:r>
           </a:p>
         </p:txBody>
@@ -3564,6 +3583,483 @@
                   <a:srgbClr val="22282E"/>
                 </a:solidFill>
               </a:rPr>
+              <a:t>•  Implementa un flujo de SCA en un repositorio con gate de CI y actualización automatizada.</a:t>
+            </a:r>
+          </a:p>
+          <a:p>
+            <a:pPr>
+              <a:spcAft>
+                <a:spcPts val="600"/>
+              </a:spcAft>
+            </a:pPr>
+            <a:r>
+              <a:rPr sz="1500">
+                <a:solidFill>
+                  <a:srgbClr val="22282E"/>
+                </a:solidFill>
+              </a:rPr>
+              <a:t>•  Criterio de aceptación: (a) el pipeline escanea dependencias (Trivy o Dependency-Check) en</a:t>
+            </a:r>
+          </a:p>
+          <a:p>
+            <a:pPr>
+              <a:spcAft>
+                <a:spcPts val="600"/>
+              </a:spcAft>
+            </a:pPr>
+            <a:r>
+              <a:rPr sz="1500">
+                <a:solidFill>
+                  <a:srgbClr val="22282E"/>
+                </a:solidFill>
+              </a:rPr>
+              <a:t>•  cada PR; (b) el gate falla solo por vulnerabilidades priorizadas por riesgo (no todo CVSS alto);</a:t>
+            </a:r>
+          </a:p>
+          <a:p>
+            <a:pPr>
+              <a:spcAft>
+                <a:spcPts val="600"/>
+              </a:spcAft>
+            </a:pPr>
+            <a:r>
+              <a:rPr sz="1500">
+                <a:solidFill>
+                  <a:srgbClr val="22282E"/>
+                </a:solidFill>
+              </a:rPr>
+              <a:t>•  (c) existe configuración de Dependabot/Renovate activa; y (d) se entrega un breve informe que</a:t>
+            </a:r>
+          </a:p>
+          <a:p>
+            <a:pPr>
+              <a:spcAft>
+                <a:spcPts val="600"/>
+              </a:spcAft>
+            </a:pPr>
+            <a:r>
+              <a:rPr sz="1500">
+                <a:solidFill>
+                  <a:srgbClr val="22282E"/>
+                </a:solidFill>
+              </a:rPr>
+              <a:t>•  prioriza los 5 hallazgos principales usando CVSS + EPSS + KEV con justificación.</a:t>
+            </a:r>
+          </a:p>
+        </p:txBody>
+      </p:sp>
+    </p:spTree>
+  </p:cSld>
+  <p:clrMapOvr>
+    <a:masterClrMapping/>
+  </p:clrMapOvr>
+</p:sld>
+</file>
+
+<file path=ppt/slides/slide13.xml><?xml version="1.0" encoding="utf-8"?>
+<p:sld xmlns:a="http://schemas.openxmlformats.org/drawingml/2006/main" xmlns:p="http://schemas.openxmlformats.org/presentationml/2006/main" xmlns:r="http://schemas.openxmlformats.org/officeDocument/2006/relationships">
+  <p:cSld>
+    <p:spTree>
+      <p:nvGrpSpPr>
+        <p:cNvPr id="1" name=""/>
+        <p:cNvGrpSpPr/>
+        <p:nvPr/>
+      </p:nvGrpSpPr>
+      <p:grpSpPr/>
+      <p:sp>
+        <p:nvSpPr>
+          <p:cNvPr id="2" name="TextBox 1"/>
+          <p:cNvSpPr txBox="1"/>
+          <p:nvPr/>
+        </p:nvSpPr>
+        <p:spPr>
+          <a:xfrm>
+            <a:off x="457200" y="320040"/>
+            <a:ext cx="8229600" cy="822960"/>
+          </a:xfrm>
+          <a:prstGeom prst="rect">
+            <a:avLst/>
+          </a:prstGeom>
+          <a:noFill/>
+        </p:spPr>
+        <p:txBody>
+          <a:bodyPr wrap="square">
+            <a:spAutoFit/>
+          </a:bodyPr>
+          <a:lstStyle/>
+          <a:p>
+            <a:r>
+              <a:rPr sz="2600" b="1">
+                <a:solidFill>
+                  <a:srgbClr val="0B3D2E"/>
+                </a:solidFill>
+              </a:rPr>
+              <a:t>⚠️ Errores comunes</a:t>
+            </a:r>
+          </a:p>
+        </p:txBody>
+      </p:sp>
+      <p:sp>
+        <p:nvSpPr>
+          <p:cNvPr id="3" name="TextBox 2"/>
+          <p:cNvSpPr txBox="1"/>
+          <p:nvPr/>
+        </p:nvSpPr>
+        <p:spPr>
+          <a:xfrm>
+            <a:off x="457200" y="1280160"/>
+            <a:ext cx="8229600" cy="4937760"/>
+          </a:xfrm>
+          <a:prstGeom prst="rect">
+            <a:avLst/>
+          </a:prstGeom>
+          <a:noFill/>
+        </p:spPr>
+        <p:txBody>
+          <a:bodyPr wrap="square">
+            <a:spAutoFit/>
+          </a:bodyPr>
+          <a:lstStyle/>
+          <a:p>
+            <a:pPr>
+              <a:spcAft>
+                <a:spcPts val="600"/>
+              </a:spcAft>
+            </a:pPr>
+            <a:r>
+              <a:rPr sz="1500">
+                <a:solidFill>
+                  <a:srgbClr val="22282E"/>
+                </a:solidFill>
+              </a:rPr>
+              <a:t>•  Cientos de CVE y el equipo se paraliza — Priorizas por CVSS crudo. Filtra por EPSS/KEV y explotabilidad, empieza por lo alcanzable.</a:t>
+            </a:r>
+          </a:p>
+          <a:p>
+            <a:pPr>
+              <a:spcAft>
+                <a:spcPts val="600"/>
+              </a:spcAft>
+            </a:pPr>
+            <a:r>
+              <a:rPr sz="1500">
+                <a:solidFill>
+                  <a:srgbClr val="22282E"/>
+                </a:solidFill>
+              </a:rPr>
+              <a:t>•  Un CVE reportado no aplica a tu uso — La función vulnerable no se usa. Documenta como no explotable (VEX) y suprime.</a:t>
+            </a:r>
+          </a:p>
+          <a:p>
+            <a:pPr>
+              <a:spcAft>
+                <a:spcPts val="600"/>
+              </a:spcAft>
+            </a:pPr>
+            <a:r>
+              <a:rPr sz="1500">
+                <a:solidFill>
+                  <a:srgbClr val="22282E"/>
+                </a:solidFill>
+              </a:rPr>
+              <a:t>•  El escaneo no ve transitivas — Escaneas manifests, no el lockfile resuelto. Escanea el lockfile (package-lock.json, poetry.lock).</a:t>
+            </a:r>
+          </a:p>
+          <a:p>
+            <a:pPr>
+              <a:spcAft>
+                <a:spcPts val="600"/>
+              </a:spcAft>
+            </a:pPr>
+            <a:r>
+              <a:rPr sz="1500">
+                <a:solidFill>
+                  <a:srgbClr val="22282E"/>
+                </a:solidFill>
+              </a:rPr>
+              <a:t>•  Dependabot abre 50 PRs y nadie los revisa — Sin límite ni agrupación. Usa open-pull-requests-limit y grouping.</a:t>
+            </a:r>
+          </a:p>
+          <a:p>
+            <a:pPr>
+              <a:spcAft>
+                <a:spcPts val="600"/>
+              </a:spcAft>
+            </a:pPr>
+            <a:r>
+              <a:rPr sz="1500">
+                <a:solidFill>
+                  <a:srgbClr val="22282E"/>
+                </a:solidFill>
+              </a:rPr>
+              <a:t>•  Actualización rompe la app — Cambio breaking. Ten tests en CI que corran antes de mergear el PR de update.</a:t>
+            </a:r>
+          </a:p>
+        </p:txBody>
+      </p:sp>
+    </p:spTree>
+  </p:cSld>
+  <p:clrMapOvr>
+    <a:masterClrMapping/>
+  </p:clrMapOvr>
+</p:sld>
+</file>
+
+<file path=ppt/slides/slide14.xml><?xml version="1.0" encoding="utf-8"?>
+<p:sld xmlns:a="http://schemas.openxmlformats.org/drawingml/2006/main" xmlns:p="http://schemas.openxmlformats.org/presentationml/2006/main" xmlns:r="http://schemas.openxmlformats.org/officeDocument/2006/relationships">
+  <p:cSld>
+    <p:spTree>
+      <p:nvGrpSpPr>
+        <p:cNvPr id="1" name=""/>
+        <p:cNvGrpSpPr/>
+        <p:nvPr/>
+      </p:nvGrpSpPr>
+      <p:grpSpPr/>
+      <p:sp>
+        <p:nvSpPr>
+          <p:cNvPr id="2" name="TextBox 1"/>
+          <p:cNvSpPr txBox="1"/>
+          <p:nvPr/>
+        </p:nvSpPr>
+        <p:spPr>
+          <a:xfrm>
+            <a:off x="457200" y="320040"/>
+            <a:ext cx="8229600" cy="822960"/>
+          </a:xfrm>
+          <a:prstGeom prst="rect">
+            <a:avLst/>
+          </a:prstGeom>
+          <a:noFill/>
+        </p:spPr>
+        <p:txBody>
+          <a:bodyPr wrap="square">
+            <a:spAutoFit/>
+          </a:bodyPr>
+          <a:lstStyle/>
+          <a:p>
+            <a:r>
+              <a:rPr sz="2600" b="1">
+                <a:solidFill>
+                  <a:srgbClr val="0B3D2E"/>
+                </a:solidFill>
+              </a:rPr>
+              <a:t>❓ Preguntas frecuentes</a:t>
+            </a:r>
+          </a:p>
+        </p:txBody>
+      </p:sp>
+      <p:sp>
+        <p:nvSpPr>
+          <p:cNvPr id="3" name="TextBox 2"/>
+          <p:cNvSpPr txBox="1"/>
+          <p:nvPr/>
+        </p:nvSpPr>
+        <p:spPr>
+          <a:xfrm>
+            <a:off x="457200" y="1280160"/>
+            <a:ext cx="8229600" cy="4937760"/>
+          </a:xfrm>
+          <a:prstGeom prst="rect">
+            <a:avLst/>
+          </a:prstGeom>
+          <a:noFill/>
+        </p:spPr>
+        <p:txBody>
+          <a:bodyPr wrap="square">
+            <a:spAutoFit/>
+          </a:bodyPr>
+          <a:lstStyle/>
+          <a:p>
+            <a:pPr>
+              <a:spcAft>
+                <a:spcPts val="600"/>
+              </a:spcAft>
+            </a:pPr>
+            <a:r>
+              <a:rPr sz="1500">
+                <a:solidFill>
+                  <a:srgbClr val="22282E"/>
+                </a:solidFill>
+              </a:rPr>
+              <a:t>•  ❓ ¿SCA y SBOM son lo mismo?</a:t>
+            </a:r>
+          </a:p>
+          <a:p>
+            <a:pPr>
+              <a:spcAft>
+                <a:spcPts val="600"/>
+              </a:spcAft>
+            </a:pPr>
+            <a:r>
+              <a:rPr sz="1500">
+                <a:solidFill>
+                  <a:srgbClr val="22282E"/>
+                </a:solidFill>
+              </a:rPr>
+              <a:t>•  No. SCA es el proceso de analizar componentes por vulnerabilidades; el SBOM (clase 246) es el inventario resultante de componentes. SCA suele producir o consumir un SBOM.</a:t>
+            </a:r>
+          </a:p>
+          <a:p>
+            <a:pPr>
+              <a:spcAft>
+                <a:spcPts val="600"/>
+              </a:spcAft>
+            </a:pPr>
+            <a:r>
+              <a:rPr sz="1500">
+                <a:solidFill>
+                  <a:srgbClr val="22282E"/>
+                </a:solidFill>
+              </a:rPr>
+              <a:t>•  ❓ ¿Debo actualizar toda dependencia con CVE inmediatamente?</a:t>
+            </a:r>
+          </a:p>
+          <a:p>
+            <a:pPr>
+              <a:spcAft>
+                <a:spcPts val="600"/>
+              </a:spcAft>
+            </a:pPr>
+            <a:r>
+              <a:rPr sz="1500">
+                <a:solidFill>
+                  <a:srgbClr val="22282E"/>
+                </a:solidFill>
+              </a:rPr>
+              <a:t>•  No ciegamente. Prioriza por explotabilidad (KEV/EPSS), exposición y si tu código usa la parte vulnerable. Un CVE crítico en una función que no llamas puede esperar.</a:t>
+            </a:r>
+          </a:p>
+          <a:p>
+            <a:pPr>
+              <a:spcAft>
+                <a:spcPts val="600"/>
+              </a:spcAft>
+            </a:pPr>
+            <a:r>
+              <a:rPr sz="1500">
+                <a:solidFill>
+                  <a:srgbClr val="22282E"/>
+                </a:solidFill>
+              </a:rPr>
+              <a:t>•  ❓ ¿Por qué dos escáneres dan resultados distintos?</a:t>
+            </a:r>
+          </a:p>
+          <a:p>
+            <a:pPr>
+              <a:spcAft>
+                <a:spcPts val="600"/>
+              </a:spcAft>
+            </a:pPr>
+            <a:r>
+              <a:rPr sz="1500">
+                <a:solidFill>
+                  <a:srgbClr val="22282E"/>
+                </a:solidFill>
+              </a:rPr>
+              <a:t>•  Usan bases de datos y heurísticas de matching diferentes (NVD, GHSA, OSV) y distinta cobertura por ecosistema. Combinar dos mejora la cobertura.</a:t>
+            </a:r>
+          </a:p>
+          <a:p>
+            <a:pPr>
+              <a:spcAft>
+                <a:spcPts val="600"/>
+              </a:spcAft>
+            </a:pPr>
+            <a:r>
+              <a:rPr sz="1500">
+                <a:solidFill>
+                  <a:srgbClr val="22282E"/>
+                </a:solidFill>
+              </a:rPr>
+              <a:t>•  ❓ ¿Cómo me protejo de typosquatting?</a:t>
+            </a:r>
+          </a:p>
+        </p:txBody>
+      </p:sp>
+    </p:spTree>
+  </p:cSld>
+  <p:clrMapOvr>
+    <a:masterClrMapping/>
+  </p:clrMapOvr>
+</p:sld>
+</file>
+
+<file path=ppt/slides/slide15.xml><?xml version="1.0" encoding="utf-8"?>
+<p:sld xmlns:a="http://schemas.openxmlformats.org/drawingml/2006/main" xmlns:p="http://schemas.openxmlformats.org/presentationml/2006/main" xmlns:r="http://schemas.openxmlformats.org/officeDocument/2006/relationships">
+  <p:cSld>
+    <p:spTree>
+      <p:nvGrpSpPr>
+        <p:cNvPr id="1" name=""/>
+        <p:cNvGrpSpPr/>
+        <p:nvPr/>
+      </p:nvGrpSpPr>
+      <p:grpSpPr/>
+      <p:sp>
+        <p:nvSpPr>
+          <p:cNvPr id="2" name="TextBox 1"/>
+          <p:cNvSpPr txBox="1"/>
+          <p:nvPr/>
+        </p:nvSpPr>
+        <p:spPr>
+          <a:xfrm>
+            <a:off x="457200" y="320040"/>
+            <a:ext cx="8229600" cy="822960"/>
+          </a:xfrm>
+          <a:prstGeom prst="rect">
+            <a:avLst/>
+          </a:prstGeom>
+          <a:noFill/>
+        </p:spPr>
+        <p:txBody>
+          <a:bodyPr wrap="square">
+            <a:spAutoFit/>
+          </a:bodyPr>
+          <a:lstStyle/>
+          <a:p>
+            <a:r>
+              <a:rPr sz="2600" b="1">
+                <a:solidFill>
+                  <a:srgbClr val="0B3D2E"/>
+                </a:solidFill>
+              </a:rPr>
+              <a:t>🔗 Referencias</a:t>
+            </a:r>
+          </a:p>
+        </p:txBody>
+      </p:sp>
+      <p:sp>
+        <p:nvSpPr>
+          <p:cNvPr id="3" name="TextBox 2"/>
+          <p:cNvSpPr txBox="1"/>
+          <p:nvPr/>
+        </p:nvSpPr>
+        <p:spPr>
+          <a:xfrm>
+            <a:off x="457200" y="1280160"/>
+            <a:ext cx="8229600" cy="4937760"/>
+          </a:xfrm>
+          <a:prstGeom prst="rect">
+            <a:avLst/>
+          </a:prstGeom>
+          <a:noFill/>
+        </p:spPr>
+        <p:txBody>
+          <a:bodyPr wrap="square">
+            <a:spAutoFit/>
+          </a:bodyPr>
+          <a:lstStyle/>
+          <a:p>
+            <a:pPr>
+              <a:spcAft>
+                <a:spcPts val="600"/>
+              </a:spcAft>
+            </a:pPr>
+            <a:r>
+              <a:rPr sz="1500">
+                <a:solidFill>
+                  <a:srgbClr val="22282E"/>
+                </a:solidFill>
+              </a:rPr>
               <a:t>•  OWASP Dependency-Check — &lt;https://owasp.org/www-project-dependency-check/&gt;</a:t>
             </a:r>
           </a:p>
@@ -3629,6 +4125,81 @@
           </a:p>
         </p:txBody>
       </p:sp>
+    </p:spTree>
+  </p:cSld>
+  <p:clrMapOvr>
+    <a:masterClrMapping/>
+  </p:clrMapOvr>
+</p:sld>
+</file>
+
+<file path=ppt/slides/slide16.xml><?xml version="1.0" encoding="utf-8"?>
+<p:sld xmlns:a="http://schemas.openxmlformats.org/drawingml/2006/main" xmlns:p="http://schemas.openxmlformats.org/presentationml/2006/main" xmlns:r="http://schemas.openxmlformats.org/officeDocument/2006/relationships">
+  <p:cSld>
+    <p:spTree>
+      <p:nvGrpSpPr>
+        <p:cNvPr id="1" name=""/>
+        <p:cNvGrpSpPr/>
+        <p:nvPr/>
+      </p:nvGrpSpPr>
+      <p:grpSpPr/>
+      <p:sp>
+        <p:nvSpPr>
+          <p:cNvPr id="2" name="TextBox 1"/>
+          <p:cNvSpPr txBox="1"/>
+          <p:nvPr/>
+        </p:nvSpPr>
+        <p:spPr>
+          <a:xfrm>
+            <a:off x="457200" y="274320"/>
+            <a:ext cx="8229600" cy="640080"/>
+          </a:xfrm>
+          <a:prstGeom prst="rect">
+            <a:avLst/>
+          </a:prstGeom>
+          <a:noFill/>
+        </p:spPr>
+        <p:txBody>
+          <a:bodyPr wrap="square">
+            <a:spAutoFit/>
+          </a:bodyPr>
+          <a:lstStyle/>
+          <a:p>
+            <a:r>
+              <a:rPr sz="2200" b="1">
+                <a:solidFill>
+                  <a:srgbClr val="0B3D2E"/>
+                </a:solidFill>
+              </a:rPr>
+              <a:t>Diagrama de la clase</a:t>
+            </a:r>
+          </a:p>
+        </p:txBody>
+      </p:sp>
+      <p:pic>
+        <p:nvPicPr>
+          <p:cNvPr id="3" name="Picture 2" descr="e02d211f917cd1c8.png"/>
+          <p:cNvPicPr>
+            <a:picLocks noChangeAspect="1"/>
+          </p:cNvPicPr>
+          <p:nvPr/>
+        </p:nvPicPr>
+        <p:blipFill>
+          <a:blip r:embed="rId2"/>
+          <a:stretch>
+            <a:fillRect/>
+          </a:stretch>
+        </p:blipFill>
+        <p:spPr>
+          <a:xfrm>
+            <a:off x="457200" y="2971800"/>
+            <a:ext cx="8229600" cy="1554480"/>
+          </a:xfrm>
+          <a:prstGeom prst="rect">
+            <a:avLst/>
+          </a:prstGeom>
+        </p:spPr>
+      </p:pic>
     </p:spTree>
   </p:cSld>
   <p:clrMapOvr>
@@ -4167,7 +4738,7 @@
                   <a:srgbClr val="0B3D2E"/>
                 </a:solidFill>
               </a:rPr>
-              <a:t>📖 Definiciones y características</a:t>
+              <a:t>🧠 Explicación en profundidad</a:t>
             </a:r>
           </a:p>
         </p:txBody>
@@ -4205,82 +4776,82 @@
                   <a:srgbClr val="22282E"/>
                 </a:solidFill>
               </a:rPr>
-              <a:t>•  SCA: análisis de componentes de terceros para detectar vulnerabilidades y riesgos. Característica: se basa en identificar versiones y cruzarlas con bases de avisos.</a:t>
-            </a:r>
-          </a:p>
-          <a:p>
-            <a:pPr>
-              <a:spcAft>
-                <a:spcPts val="600"/>
-              </a:spcAft>
-            </a:pPr>
-            <a:r>
-              <a:rPr sz="1500">
-                <a:solidFill>
-                  <a:srgbClr val="22282E"/>
-                </a:solidFill>
-              </a:rPr>
-              <a:t>•  Dependencia transitiva: dependencia de tus dependencias. Característica: no la declaraste tú, pero corre en tu app; suele ser el mayor riesgo.</a:t>
-            </a:r>
-          </a:p>
-          <a:p>
-            <a:pPr>
-              <a:spcAft>
-                <a:spcPts val="600"/>
-              </a:spcAft>
-            </a:pPr>
-            <a:r>
-              <a:rPr sz="1500">
-                <a:solidFill>
-                  <a:srgbClr val="22282E"/>
-                </a:solidFill>
-              </a:rPr>
-              <a:t>•  CVE / CVSS: identificador y puntuación de severidad de una vulnerabilidad. Característica: CVSS mide severidad teórica, no probabilidad de explotación.</a:t>
-            </a:r>
-          </a:p>
-          <a:p>
-            <a:pPr>
-              <a:spcAft>
-                <a:spcPts val="600"/>
-              </a:spcAft>
-            </a:pPr>
-            <a:r>
-              <a:rPr sz="1500">
-                <a:solidFill>
-                  <a:srgbClr val="22282E"/>
-                </a:solidFill>
-              </a:rPr>
-              <a:t>•  EPSS: probabilidad de que un CVE sea explotado en 30 días. Característica: prioriza mejor que CVSS solo.</a:t>
-            </a:r>
-          </a:p>
-          <a:p>
-            <a:pPr>
-              <a:spcAft>
-                <a:spcPts val="600"/>
-              </a:spcAft>
-            </a:pPr>
-            <a:r>
-              <a:rPr sz="1500">
-                <a:solidFill>
-                  <a:srgbClr val="22282E"/>
-                </a:solidFill>
-              </a:rPr>
-              <a:t>•  KEV (CISA): catálogo de vulnerabilidades explotadas activamente. Característica: si está en KEV, es prioridad máxima.</a:t>
-            </a:r>
-          </a:p>
-          <a:p>
-            <a:pPr>
-              <a:spcAft>
-                <a:spcPts val="600"/>
-              </a:spcAft>
-            </a:pPr>
-            <a:r>
-              <a:rPr sz="1500">
-                <a:solidFill>
-                  <a:srgbClr val="22282E"/>
-                </a:solidFill>
-              </a:rPr>
-              <a:t>•  Typosquatting: paquete malicioso con nombre parecido a uno legítimo. Característica: ataque a la cadena de suministro por confusión de nombre.</a:t>
+              <a:t>•  SCA construye un inventario de componentes y versiones y los correlaciona con avisos de vulnerabilidad. Parece una comparación simple, pero intervienen identidad del paquete, ecosistema, versión…</a:t>
+            </a:r>
+          </a:p>
+          <a:p>
+            <a:pPr>
+              <a:spcAft>
+                <a:spcPts val="600"/>
+              </a:spcAft>
+            </a:pPr>
+            <a:r>
+              <a:rPr sz="1500">
+                <a:solidFill>
+                  <a:srgbClr val="22282E"/>
+                </a:solidFill>
+              </a:rPr>
+              <a:t>•  El diagrama muestra dos problemas diferentes: saber qué hay y decidir qué importa. Una coincidencia puede ser incorrecta por un identificador ambiguo; puede afectar una función nunca incluida; o…</a:t>
+            </a:r>
+          </a:p>
+          <a:p>
+            <a:pPr>
+              <a:spcAft>
+                <a:spcPts val="600"/>
+              </a:spcAft>
+            </a:pPr>
+            <a:r>
+              <a:rPr sz="1500">
+                <a:solidFill>
+                  <a:srgbClr val="22282E"/>
+                </a:solidFill>
+              </a:rPr>
+              <a:t>•  La dependencia vulnerable puede ser directa o llegar a través de otra biblioteca. Antes de actualizar hay que identificar qué paquete la introduce, si existe una versión compatible, qué cambios…</a:t>
+            </a:r>
+          </a:p>
+          <a:p>
+            <a:pPr>
+              <a:spcAft>
+                <a:spcPts val="600"/>
+              </a:spcAft>
+            </a:pPr>
+            <a:r>
+              <a:rPr sz="1500">
+                <a:solidFill>
+                  <a:srgbClr val="22282E"/>
+                </a:solidFill>
+              </a:rPr>
+              <a:t>•  Los gates deben evitar tanto el abandono como el bloqueo indiscriminado. Un patrón práctico es impedir componentes nuevos con vulnerabilidades por encima de la política, tratar KEV con prioridad…</a:t>
+            </a:r>
+          </a:p>
+          <a:p>
+            <a:pPr>
+              <a:spcAft>
+                <a:spcPts val="600"/>
+              </a:spcAft>
+            </a:pPr>
+            <a:r>
+              <a:rPr sz="1500">
+                <a:solidFill>
+                  <a:srgbClr val="22282E"/>
+                </a:solidFill>
+              </a:rPr>
+              <a:t>•  El riesgo de terceros no termina en CVE. Incluye licencias incompatibles, paquetes abandonados, nombres confundibles, mantenedores comprometidos y scripts de instalación. SCA aporta inventario, pero…</a:t>
+            </a:r>
+          </a:p>
+          <a:p>
+            <a:pPr>
+              <a:spcAft>
+                <a:spcPts val="600"/>
+              </a:spcAft>
+            </a:pPr>
+            <a:r>
+              <a:rPr sz="1500">
+                <a:solidFill>
+                  <a:srgbClr val="22282E"/>
+                </a:solidFill>
+              </a:rPr>
+              <a:t>•  El escáner encuentra un CVSS crítico en una biblioteca presente solo en el generador de documentación, fuera de la imagen final. El equipo verifica el SBOM del artefacto y confirma que no se…</a:t>
             </a:r>
           </a:p>
         </p:txBody>
@@ -4331,7 +4902,7 @@
                   <a:srgbClr val="0B3D2E"/>
                 </a:solidFill>
               </a:rPr>
-              <a:t>🧰 Herramientas y preparación</a:t>
+              <a:t>📔 Glosario operativo</a:t>
             </a:r>
           </a:p>
         </p:txBody>
@@ -4369,97 +4940,97 @@
                   <a:srgbClr val="22282E"/>
                 </a:solidFill>
               </a:rPr>
-              <a:t>•  OWASP Dependency-Check — SCA para Java, .NET, JS, Python y más; cruza con NVD.</a:t>
-            </a:r>
-          </a:p>
-          <a:p>
-            <a:pPr>
-              <a:spcAft>
-                <a:spcPts val="600"/>
-              </a:spcAft>
-            </a:pPr>
-            <a:r>
-              <a:rPr sz="1500">
-                <a:solidFill>
-                  <a:srgbClr val="22282E"/>
-                </a:solidFill>
-              </a:rPr>
-              <a:t>•  Trivy — escáner todo-en-uno (dependencias, imágenes, IaC, secretos).</a:t>
-            </a:r>
-          </a:p>
-          <a:p>
-            <a:pPr>
-              <a:spcAft>
-                <a:spcPts val="600"/>
-              </a:spcAft>
-            </a:pPr>
-            <a:r>
-              <a:rPr sz="1500">
-                <a:solidFill>
-                  <a:srgbClr val="22282E"/>
-                </a:solidFill>
-              </a:rPr>
-              <a:t>•  osv-scanner (Google) — usa la base OSV, muy buena para lenguajes modernos.</a:t>
-            </a:r>
-          </a:p>
-          <a:p>
-            <a:pPr>
-              <a:spcAft>
-                <a:spcPts val="600"/>
-              </a:spcAft>
-            </a:pPr>
-            <a:r>
-              <a:rPr sz="1500">
-                <a:solidFill>
-                  <a:srgbClr val="22282E"/>
-                </a:solidFill>
-              </a:rPr>
-              <a:t>•  Dependabot / Renovate — PRs automáticos de actualización.</a:t>
-            </a:r>
-          </a:p>
-          <a:p>
-            <a:pPr>
-              <a:spcAft>
-                <a:spcPts val="600"/>
-              </a:spcAft>
-            </a:pPr>
-            <a:r>
-              <a:rPr sz="1500">
-                <a:solidFill>
-                  <a:srgbClr val="22282E"/>
-                </a:solidFill>
-              </a:rPr>
-              <a:t>•  Instalación y uso básico:</a:t>
-            </a:r>
-          </a:p>
-          <a:p>
-            <a:pPr>
-              <a:spcAft>
-                <a:spcPts val="600"/>
-              </a:spcAft>
-            </a:pPr>
-            <a:r>
-              <a:rPr sz="1500">
-                <a:solidFill>
-                  <a:srgbClr val="22282E"/>
-                </a:solidFill>
-              </a:rPr>
-              <a:t>•  trivy fs --scanners vuln ./mi-proyecto</a:t>
-            </a:r>
-          </a:p>
-          <a:p>
-            <a:pPr>
-              <a:spcAft>
-                <a:spcPts val="600"/>
-              </a:spcAft>
-            </a:pPr>
-            <a:r>
-              <a:rPr sz="1500">
-                <a:solidFill>
-                  <a:srgbClr val="22282E"/>
-                </a:solidFill>
-              </a:rPr>
-              <a:t>•  dependency-check --project miapp --scan ./ --format HTML --out reporte/</a:t>
+              <a:t>•  Término — Definición útil</a:t>
+            </a:r>
+          </a:p>
+          <a:p>
+            <a:pPr>
+              <a:spcAft>
+                <a:spcPts val="600"/>
+              </a:spcAft>
+            </a:pPr>
+            <a:r>
+              <a:rPr sz="1500">
+                <a:solidFill>
+                  <a:srgbClr val="22282E"/>
+                </a:solidFill>
+              </a:rPr>
+              <a:t>•  Dependencia transitiva — Componente incorporado por otra dependencia, no declarado directamente.</a:t>
+            </a:r>
+          </a:p>
+          <a:p>
+            <a:pPr>
+              <a:spcAft>
+                <a:spcPts val="600"/>
+              </a:spcAft>
+            </a:pPr>
+            <a:r>
+              <a:rPr sz="1500">
+                <a:solidFill>
+                  <a:srgbClr val="22282E"/>
+                </a:solidFill>
+              </a:rPr>
+              <a:t>•  Lockfile — Registro reproducible de versiones e integridad resueltas.</a:t>
+            </a:r>
+          </a:p>
+          <a:p>
+            <a:pPr>
+              <a:spcAft>
+                <a:spcPts val="600"/>
+              </a:spcAft>
+            </a:pPr>
+            <a:r>
+              <a:rPr sz="1500">
+                <a:solidFill>
+                  <a:srgbClr val="22282E"/>
+                </a:solidFill>
+              </a:rPr>
+              <a:t>•  Reachability — Evidencia de que el código vulnerable puede alcanzarse desde el producto.</a:t>
+            </a:r>
+          </a:p>
+          <a:p>
+            <a:pPr>
+              <a:spcAft>
+                <a:spcPts val="600"/>
+              </a:spcAft>
+            </a:pPr>
+            <a:r>
+              <a:rPr sz="1500">
+                <a:solidFill>
+                  <a:srgbClr val="22282E"/>
+                </a:solidFill>
+              </a:rPr>
+              <a:t>•  KEV — Catálogo de CISA de vulnerabilidades conocidas como explotadas.</a:t>
+            </a:r>
+          </a:p>
+          <a:p>
+            <a:pPr>
+              <a:spcAft>
+                <a:spcPts val="600"/>
+              </a:spcAft>
+            </a:pPr>
+            <a:r>
+              <a:rPr sz="1500">
+                <a:solidFill>
+                  <a:srgbClr val="22282E"/>
+                </a:solidFill>
+              </a:rPr>
+              <a:t>•  EPSS — Estimación probabilística de explotación; no mide impacto propio.</a:t>
+            </a:r>
+          </a:p>
+          <a:p>
+            <a:pPr>
+              <a:spcAft>
+                <a:spcPts val="600"/>
+              </a:spcAft>
+            </a:pPr>
+            <a:r>
+              <a:rPr sz="1500">
+                <a:solidFill>
+                  <a:srgbClr val="22282E"/>
+                </a:solidFill>
+              </a:rPr>
+              <a:t>•  VEX — Declaración del estado de afectación de un producto respecto de vulnerabilidades.</a:t>
             </a:r>
           </a:p>
         </p:txBody>
@@ -4510,7 +5081,7 @@
                   <a:srgbClr val="0B3D2E"/>
                 </a:solidFill>
               </a:rPr>
-              <a:t>🧪 Laboratorio guiado</a:t>
+              <a:t>✅ Criterio de dominio</a:t>
             </a:r>
           </a:p>
         </p:txBody>
@@ -4548,97 +5119,7 @@
                   <a:srgbClr val="22282E"/>
                 </a:solidFill>
               </a:rPr>
-              <a:t>•  Inspecciona el árbol de dependencias de un proyecto real (p. ej. npm ls --all o pip list + pipdeptree). Observa cuántas son transitivas.</a:t>
-            </a:r>
-          </a:p>
-          <a:p>
-            <a:pPr>
-              <a:spcAft>
-                <a:spcPts val="600"/>
-              </a:spcAft>
-            </a:pPr>
-            <a:r>
-              <a:rPr sz="1500">
-                <a:solidFill>
-                  <a:srgbClr val="22282E"/>
-                </a:solidFill>
-              </a:rPr>
-              <a:t>•  Escanea con Trivy:</a:t>
-            </a:r>
-          </a:p>
-          <a:p>
-            <a:pPr>
-              <a:spcAft>
-                <a:spcPts val="600"/>
-              </a:spcAft>
-            </a:pPr>
-            <a:r>
-              <a:rPr sz="1500">
-                <a:solidFill>
-                  <a:srgbClr val="22282E"/>
-                </a:solidFill>
-              </a:rPr>
-              <a:t>•  trivy fs --scanners vuln --severity HIGH,CRITICAL ./mi-proyecto</a:t>
-            </a:r>
-          </a:p>
-          <a:p>
-            <a:pPr>
-              <a:spcAft>
-                <a:spcPts val="600"/>
-              </a:spcAft>
-            </a:pPr>
-            <a:r>
-              <a:rPr sz="1500">
-                <a:solidFill>
-                  <a:srgbClr val="22282E"/>
-                </a:solidFill>
-              </a:rPr>
-              <a:t>•  Escanea con Dependency-Check y compara resultados; nota que cada herramienta usa fuentes distintas y puede diferir.</a:t>
-            </a:r>
-          </a:p>
-          <a:p>
-            <a:pPr>
-              <a:spcAft>
-                <a:spcPts val="600"/>
-              </a:spcAft>
-            </a:pPr>
-            <a:r>
-              <a:rPr sz="1500">
-                <a:solidFill>
-                  <a:srgbClr val="22282E"/>
-                </a:solidFill>
-              </a:rPr>
-              <a:t>•  Prioriza con EPSS y KEV. Toma los 5 CVE reportados, busca su EPSS (api.first.org/data/v1/epss) y comprueba si están en el catálogo CISA KEV. Reordena por riesgo real, no por CVSS.</a:t>
-            </a:r>
-          </a:p>
-          <a:p>
-            <a:pPr>
-              <a:spcAft>
-                <a:spcPts val="600"/>
-              </a:spcAft>
-            </a:pPr>
-            <a:r>
-              <a:rPr sz="1500">
-                <a:solidFill>
-                  <a:srgbClr val="22282E"/>
-                </a:solidFill>
-              </a:rPr>
-              <a:t>•  Configura un gate en CI:</a:t>
-            </a:r>
-          </a:p>
-          <a:p>
-            <a:pPr>
-              <a:spcAft>
-                <a:spcPts val="600"/>
-              </a:spcAft>
-            </a:pPr>
-            <a:r>
-              <a:rPr sz="1500">
-                <a:solidFill>
-                  <a:srgbClr val="22282E"/>
-                </a:solidFill>
-              </a:rPr>
-              <a:t>•  trivy fs --exit-code 1 --severity CRITICAL --scanners vuln ./</a:t>
+              <a:t>•  Hay dominio cuando el alumno reconstruye la ruta de una dependencia hasta el artefacto, valida la coincidencia, diferencia severidad de riesgo, propone una actualización comprobable y documenta una…</a:t>
             </a:r>
           </a:p>
         </p:txBody>
@@ -4689,7 +5170,7 @@
                   <a:srgbClr val="0B3D2E"/>
                 </a:solidFill>
               </a:rPr>
-              <a:t>✍️ Ejercicios</a:t>
+              <a:t>📖 Definiciones y características</a:t>
             </a:r>
           </a:p>
         </p:txBody>
@@ -4727,82 +5208,82 @@
                   <a:srgbClr val="22282E"/>
                 </a:solidFill>
               </a:rPr>
-              <a:t>•  Genera el árbol de dependencias de un proyecto y cuenta directas vs transitivas.</a:t>
-            </a:r>
-          </a:p>
-          <a:p>
-            <a:pPr>
-              <a:spcAft>
-                <a:spcPts val="600"/>
-              </a:spcAft>
-            </a:pPr>
-            <a:r>
-              <a:rPr sz="1500">
-                <a:solidFill>
-                  <a:srgbClr val="22282E"/>
-                </a:solidFill>
-              </a:rPr>
-              <a:t>•  Escanea el mismo repo con Trivy y Dependency-Check y explica las diferencias.</a:t>
-            </a:r>
-          </a:p>
-          <a:p>
-            <a:pPr>
-              <a:spcAft>
-                <a:spcPts val="600"/>
-              </a:spcAft>
-            </a:pPr>
-            <a:r>
-              <a:rPr sz="1500">
-                <a:solidFill>
-                  <a:srgbClr val="22282E"/>
-                </a:solidFill>
-              </a:rPr>
-              <a:t>•  Prioriza 5 CVE combinando CVSS, EPSS y KEV.</a:t>
-            </a:r>
-          </a:p>
-          <a:p>
-            <a:pPr>
-              <a:spcAft>
-                <a:spcPts val="600"/>
-              </a:spcAft>
-            </a:pPr>
-            <a:r>
-              <a:rPr sz="1500">
-                <a:solidFill>
-                  <a:srgbClr val="22282E"/>
-                </a:solidFill>
-              </a:rPr>
-              <a:t>•  Configura un gate que solo falle con CRITICAL explotable.</a:t>
-            </a:r>
-          </a:p>
-          <a:p>
-            <a:pPr>
-              <a:spcAft>
-                <a:spcPts val="600"/>
-              </a:spcAft>
-            </a:pPr>
-            <a:r>
-              <a:rPr sz="1500">
-                <a:solidFill>
-                  <a:srgbClr val="22282E"/>
-                </a:solidFill>
-              </a:rPr>
-              <a:t>•  Crea la configuración de Dependabot o Renovate para tu ecosistema.</a:t>
-            </a:r>
-          </a:p>
-          <a:p>
-            <a:pPr>
-              <a:spcAft>
-                <a:spcPts val="600"/>
-              </a:spcAft>
-            </a:pPr>
-            <a:r>
-              <a:rPr sz="1500">
-                <a:solidFill>
-                  <a:srgbClr val="22282E"/>
-                </a:solidFill>
-              </a:rPr>
-              <a:t>•  Detecta una dependencia con licencia problemática y propón alternativa.</a:t>
+              <a:t>•  SCA: análisis de componentes de terceros para detectar vulnerabilidades y riesgos. Característica: se basa en identificar versiones y cruzarlas con bases de avisos.</a:t>
+            </a:r>
+          </a:p>
+          <a:p>
+            <a:pPr>
+              <a:spcAft>
+                <a:spcPts val="600"/>
+              </a:spcAft>
+            </a:pPr>
+            <a:r>
+              <a:rPr sz="1500">
+                <a:solidFill>
+                  <a:srgbClr val="22282E"/>
+                </a:solidFill>
+              </a:rPr>
+              <a:t>•  Dependencia transitiva: dependencia de tus dependencias. Característica: no la declaraste tú, pero corre en tu app; suele ser el mayor riesgo.</a:t>
+            </a:r>
+          </a:p>
+          <a:p>
+            <a:pPr>
+              <a:spcAft>
+                <a:spcPts val="600"/>
+              </a:spcAft>
+            </a:pPr>
+            <a:r>
+              <a:rPr sz="1500">
+                <a:solidFill>
+                  <a:srgbClr val="22282E"/>
+                </a:solidFill>
+              </a:rPr>
+              <a:t>•  CVE / CVSS: identificador y puntuación de severidad de una vulnerabilidad. Característica: CVSS mide severidad teórica, no probabilidad de explotación.</a:t>
+            </a:r>
+          </a:p>
+          <a:p>
+            <a:pPr>
+              <a:spcAft>
+                <a:spcPts val="600"/>
+              </a:spcAft>
+            </a:pPr>
+            <a:r>
+              <a:rPr sz="1500">
+                <a:solidFill>
+                  <a:srgbClr val="22282E"/>
+                </a:solidFill>
+              </a:rPr>
+              <a:t>•  EPSS: probabilidad de que un CVE sea explotado en 30 días. Característica: prioriza mejor que CVSS solo.</a:t>
+            </a:r>
+          </a:p>
+          <a:p>
+            <a:pPr>
+              <a:spcAft>
+                <a:spcPts val="600"/>
+              </a:spcAft>
+            </a:pPr>
+            <a:r>
+              <a:rPr sz="1500">
+                <a:solidFill>
+                  <a:srgbClr val="22282E"/>
+                </a:solidFill>
+              </a:rPr>
+              <a:t>•  KEV (CISA): catálogo de vulnerabilidades explotadas activamente. Característica: si está en KEV, es prioridad máxima.</a:t>
+            </a:r>
+          </a:p>
+          <a:p>
+            <a:pPr>
+              <a:spcAft>
+                <a:spcPts val="600"/>
+              </a:spcAft>
+            </a:pPr>
+            <a:r>
+              <a:rPr sz="1500">
+                <a:solidFill>
+                  <a:srgbClr val="22282E"/>
+                </a:solidFill>
+              </a:rPr>
+              <a:t>•  Typosquatting: paquete malicioso con nombre parecido a uno legítimo. Característica: ataque a la cadena de suministro por confusión de nombre.</a:t>
             </a:r>
           </a:p>
         </p:txBody>
@@ -4853,7 +5334,7 @@
                   <a:srgbClr val="0B3D2E"/>
                 </a:solidFill>
               </a:rPr>
-              <a:t>📝 Reto verificable</a:t>
+              <a:t>🧰 Herramientas y preparación</a:t>
             </a:r>
           </a:p>
         </p:txBody>
@@ -4891,67 +5372,67 @@
                   <a:srgbClr val="22282E"/>
                 </a:solidFill>
               </a:rPr>
-              <a:t>•  Implementa un flujo de SCA en un repositorio con gate de CI y actualización automatizada.</a:t>
-            </a:r>
-          </a:p>
-          <a:p>
-            <a:pPr>
-              <a:spcAft>
-                <a:spcPts val="600"/>
-              </a:spcAft>
-            </a:pPr>
-            <a:r>
-              <a:rPr sz="1500">
-                <a:solidFill>
-                  <a:srgbClr val="22282E"/>
-                </a:solidFill>
-              </a:rPr>
-              <a:t>•  Criterio de aceptación: (a) el pipeline escanea dependencias (Trivy o Dependency-Check) en</a:t>
-            </a:r>
-          </a:p>
-          <a:p>
-            <a:pPr>
-              <a:spcAft>
-                <a:spcPts val="600"/>
-              </a:spcAft>
-            </a:pPr>
-            <a:r>
-              <a:rPr sz="1500">
-                <a:solidFill>
-                  <a:srgbClr val="22282E"/>
-                </a:solidFill>
-              </a:rPr>
-              <a:t>•  cada PR; (b) el gate falla solo por vulnerabilidades priorizadas por riesgo (no todo CVSS alto);</a:t>
-            </a:r>
-          </a:p>
-          <a:p>
-            <a:pPr>
-              <a:spcAft>
-                <a:spcPts val="600"/>
-              </a:spcAft>
-            </a:pPr>
-            <a:r>
-              <a:rPr sz="1500">
-                <a:solidFill>
-                  <a:srgbClr val="22282E"/>
-                </a:solidFill>
-              </a:rPr>
-              <a:t>•  (c) existe configuración de Dependabot/Renovate activa; y (d) se entrega un breve informe que</a:t>
-            </a:r>
-          </a:p>
-          <a:p>
-            <a:pPr>
-              <a:spcAft>
-                <a:spcPts val="600"/>
-              </a:spcAft>
-            </a:pPr>
-            <a:r>
-              <a:rPr sz="1500">
-                <a:solidFill>
-                  <a:srgbClr val="22282E"/>
-                </a:solidFill>
-              </a:rPr>
-              <a:t>•  prioriza los 5 hallazgos principales usando CVSS + EPSS + KEV con justificación.</a:t>
+              <a:t>•  OWASP Dependency-Check — SCA para Java, .NET, JS, Python y más; cruza con NVD.</a:t>
+            </a:r>
+          </a:p>
+          <a:p>
+            <a:pPr>
+              <a:spcAft>
+                <a:spcPts val="600"/>
+              </a:spcAft>
+            </a:pPr>
+            <a:r>
+              <a:rPr sz="1500">
+                <a:solidFill>
+                  <a:srgbClr val="22282E"/>
+                </a:solidFill>
+              </a:rPr>
+              <a:t>•  Trivy — escáner todo-en-uno (dependencias, imágenes, IaC, secretos).</a:t>
+            </a:r>
+          </a:p>
+          <a:p>
+            <a:pPr>
+              <a:spcAft>
+                <a:spcPts val="600"/>
+              </a:spcAft>
+            </a:pPr>
+            <a:r>
+              <a:rPr sz="1500">
+                <a:solidFill>
+                  <a:srgbClr val="22282E"/>
+                </a:solidFill>
+              </a:rPr>
+              <a:t>•  osv-scanner (Google) — usa la base OSV, muy buena para lenguajes modernos.</a:t>
+            </a:r>
+          </a:p>
+          <a:p>
+            <a:pPr>
+              <a:spcAft>
+                <a:spcPts val="600"/>
+              </a:spcAft>
+            </a:pPr>
+            <a:r>
+              <a:rPr sz="1500">
+                <a:solidFill>
+                  <a:srgbClr val="22282E"/>
+                </a:solidFill>
+              </a:rPr>
+              <a:t>•  Dependabot / Renovate — PRs automáticos de actualización.</a:t>
+            </a:r>
+          </a:p>
+          <a:p>
+            <a:pPr>
+              <a:spcAft>
+                <a:spcPts val="600"/>
+              </a:spcAft>
+            </a:pPr>
+            <a:r>
+              <a:rPr sz="1500">
+                <a:solidFill>
+                  <a:srgbClr val="22282E"/>
+                </a:solidFill>
+              </a:rPr>
+              <a:t>•  Instalación y uso básico:</a:t>
             </a:r>
           </a:p>
         </p:txBody>
